--- a/apps/resources/bundled_files/6-klass-katysh-sabak.pptx
+++ b/apps/resources/bundled_files/6-klass-katysh-sabak.pptx
@@ -5196,7 +5196,7 @@
                 </a:solidFill>
                 <a:latin typeface="PT Sans"/>
               </a:rPr>
-              <a:t>6-класс · Математика</a:t>
+              <a:t/>
             </a:r>
           </a:p>
         </p:txBody>
@@ -5400,7 +5400,7 @@
                 </a:solidFill>
                 <a:latin typeface="PT Sans"/>
               </a:rPr>
-              <a:t>Китеп: Математика стандарты, 6-класс: катыш (Cambridge Stage 6, улуттук B). Мазмуну оригиналдуу; кийинки тема – «Пропорция жана процент» пакети.</a:t>
+              <a:t>Китеп: Математика стандарты, 6-класс: катыш (улуттук B). Мазмуну оригиналдуу; кийинки тема – «Пропорция жана процент» пакети.</a:t>
             </a:r>
           </a:p>
         </p:txBody>
@@ -5688,7 +5688,7 @@
                 </a:solidFill>
                 <a:latin typeface="PT Sans"/>
               </a:rPr>
-              <a:t>6-класс ›</a:t>
+              <a:t/>
             </a:r>
           </a:p>
           <a:p>
@@ -6637,7 +6637,7 @@
                 </a:solidFill>
                 <a:latin typeface="PT Sans"/>
               </a:rPr>
-              <a:t>6-класс ›</a:t>
+              <a:t/>
             </a:r>
           </a:p>
           <a:p>
@@ -8780,7 +8780,7 @@
                 </a:solidFill>
                 <a:latin typeface="PT Sans"/>
               </a:rPr>
-              <a:t>6-класс ›</a:t>
+              <a:t/>
             </a:r>
           </a:p>
           <a:p>
@@ -10527,7 +10527,7 @@
                 </a:solidFill>
                 <a:latin typeface="PT Sans"/>
               </a:rPr>
-              <a:t>6-класс ›</a:t>
+              <a:t/>
             </a:r>
           </a:p>
           <a:p>
@@ -12110,7 +12110,7 @@
                 </a:solidFill>
                 <a:latin typeface="PT Sans"/>
               </a:rPr>
-              <a:t>6-класс ›</a:t>
+              <a:t/>
             </a:r>
           </a:p>
           <a:p>
@@ -12861,7 +12861,7 @@
                 </a:solidFill>
                 <a:latin typeface="PT Sans"/>
               </a:rPr>
-              <a:t>6-класс ›</a:t>
+              <a:t/>
             </a:r>
           </a:p>
           <a:p>
@@ -13612,7 +13612,7 @@
                 </a:solidFill>
                 <a:latin typeface="PT Sans"/>
               </a:rPr>
-              <a:t>6-класс ›</a:t>
+              <a:t/>
             </a:r>
           </a:p>
           <a:p>
@@ -15278,7 +15278,7 @@
                 </a:solidFill>
                 <a:latin typeface="PT Sans"/>
               </a:rPr>
-              <a:t>6-класс ›</a:t>
+              <a:t/>
             </a:r>
           </a:p>
           <a:p>
@@ -16362,7 +16362,7 @@
                 </a:solidFill>
                 <a:latin typeface="PT Sans"/>
               </a:rPr>
-              <a:t>6-класс ›</a:t>
+              <a:t/>
             </a:r>
           </a:p>
           <a:p>
@@ -17892,7 +17892,7 @@
                 </a:solidFill>
                 <a:latin typeface="PT Sans"/>
               </a:rPr>
-              <a:t>6-класс ›</a:t>
+              <a:t/>
             </a:r>
           </a:p>
           <a:p>
@@ -20179,7 +20179,7 @@
                 </a:solidFill>
                 <a:latin typeface="PT Sans"/>
               </a:rPr>
-              <a:t>6-класс ›</a:t>
+              <a:t/>
             </a:r>
           </a:p>
           <a:p>
@@ -21456,7 +21456,7 @@
                 </a:solidFill>
                 <a:latin typeface="PT Sans"/>
               </a:rPr>
-              <a:t>6-класс ›</a:t>
+              <a:t/>
             </a:r>
           </a:p>
           <a:p>
@@ -22884,7 +22884,7 @@
                 </a:solidFill>
                 <a:latin typeface="PT Sans"/>
               </a:rPr>
-              <a:t>6-класс ›</a:t>
+              <a:t/>
             </a:r>
           </a:p>
           <a:p>
@@ -24340,7 +24340,7 @@
                 </a:solidFill>
                 <a:latin typeface="PT Sans"/>
               </a:rPr>
-              <a:t>6-класс ›</a:t>
+              <a:t/>
             </a:r>
           </a:p>
           <a:p>
@@ -25574,7 +25574,7 @@
                 </a:solidFill>
                 <a:latin typeface="PT Sans"/>
               </a:rPr>
-              <a:t>6-класс ›</a:t>
+              <a:t/>
             </a:r>
           </a:p>
           <a:p>
@@ -26374,7 +26374,7 @@
                 </a:solidFill>
                 <a:latin typeface="PT Sans"/>
               </a:rPr>
-              <a:t>6-класс ›</a:t>
+              <a:t/>
             </a:r>
           </a:p>
           <a:p>
@@ -27215,7 +27215,7 @@
                 </a:solidFill>
                 <a:latin typeface="PT Sans"/>
               </a:rPr>
-              <a:t>6-класс ›</a:t>
+              <a:t/>
             </a:r>
           </a:p>
           <a:p>
@@ -28164,7 +28164,7 @@
                 </a:solidFill>
                 <a:latin typeface="PT Sans"/>
               </a:rPr>
-              <a:t>6-класс ›</a:t>
+              <a:t/>
             </a:r>
           </a:p>
           <a:p>
@@ -29618,7 +29618,7 @@
                 </a:solidFill>
                 <a:latin typeface="PT Sans"/>
               </a:rPr>
-              <a:t>6-класс ›</a:t>
+              <a:t/>
             </a:r>
           </a:p>
           <a:p>
@@ -30364,7 +30364,7 @@
                 </a:solidFill>
                 <a:latin typeface="PT Sans"/>
               </a:rPr>
-              <a:t>6-класс ›</a:t>
+              <a:t/>
             </a:r>
           </a:p>
           <a:p>
@@ -31172,7 +31172,7 @@
                 </a:solidFill>
                 <a:latin typeface="PT Sans"/>
               </a:rPr>
-              <a:t>6-класс ›</a:t>
+              <a:t/>
             </a:r>
           </a:p>
           <a:p>
@@ -32363,7 +32363,7 @@
                 </a:solidFill>
                 <a:latin typeface="PT Sans"/>
               </a:rPr>
-              <a:t>6-класс ›</a:t>
+              <a:t/>
             </a:r>
           </a:p>
           <a:p>
@@ -33558,7 +33558,7 @@
                 </a:solidFill>
                 <a:latin typeface="PT Sans"/>
               </a:rPr>
-              <a:t>6-класс ›</a:t>
+              <a:t/>
             </a:r>
           </a:p>
           <a:p>
@@ -33739,7 +33739,7 @@
                 </a:solidFill>
                 <a:latin typeface="PT Sans"/>
               </a:rPr>
-              <a:t>5-класс</a:t>
+              <a:t/>
             </a:r>
           </a:p>
         </p:txBody>
@@ -33919,7 +33919,7 @@
                 </a:solidFill>
                 <a:latin typeface="PT Sans"/>
               </a:rPr>
-              <a:t>6-класс</a:t>
+              <a:t/>
             </a:r>
           </a:p>
         </p:txBody>
@@ -34099,7 +34099,7 @@
                 </a:solidFill>
                 <a:latin typeface="PT Sans"/>
               </a:rPr>
-              <a:t>6-класс</a:t>
+              <a:t/>
             </a:r>
           </a:p>
         </p:txBody>
@@ -34335,7 +34335,7 @@
                 </a:solidFill>
                 <a:latin typeface="PT Sans"/>
               </a:rPr>
-              <a:t>6-класс</a:t>
+              <a:t/>
             </a:r>
           </a:p>
         </p:txBody>
@@ -34755,7 +34755,7 @@
                 </a:solidFill>
                 <a:latin typeface="PT Sans"/>
               </a:rPr>
-              <a:t>6-класс ›</a:t>
+              <a:t/>
             </a:r>
           </a:p>
           <a:p>
@@ -35903,7 +35903,7 @@
                 </a:solidFill>
                 <a:latin typeface="PT Sans"/>
               </a:rPr>
-              <a:t>6-класс ›</a:t>
+              <a:t/>
             </a:r>
           </a:p>
           <a:p>

--- a/apps/resources/bundled_files/6-klass-katysh-sabak.pptx
+++ b/apps/resources/bundled_files/6-klass-katysh-sabak.pptx
@@ -1582,7 +1582,7 @@
           <a:lstStyle/>
           <a:p>
             <a:r>
-              <a:t>Ой жүгүртүү маданияты (Wenxi Lee, 2.6).</a:t>
+              <a:t>Ой жүгүртүү маданияты (Wenxi Lee, 2,6).</a:t>
             </a:r>
           </a:p>
         </p:txBody>
